--- a/20260522_pg_explain/[slide] Explain in PostgreSQL.pptx
+++ b/20260522_pg_explain/[slide] Explain in PostgreSQL.pptx
@@ -1362,6 +1362,13 @@
             <a:prstDash val="solid"/>
           </a:ln>
         </p:spPr>
+        <p:txBody>
+          <a:bodyPr/>
+          <a:lstStyle/>
+          <a:p>
+            <a:endParaRPr lang="ko-KR" altLang="en-US"/>
+          </a:p>
+        </p:txBody>
       </p:sp>
       <p:sp>
         <p:nvSpPr>
@@ -1387,6 +1394,13 @@
             <a:prstDash val="solid"/>
           </a:ln>
         </p:spPr>
+        <p:txBody>
+          <a:bodyPr/>
+          <a:lstStyle/>
+          <a:p>
+            <a:endParaRPr lang="ko-KR" altLang="en-US"/>
+          </a:p>
+        </p:txBody>
       </p:sp>
       <p:sp>
         <p:nvSpPr>
@@ -1414,6 +1428,13 @@
             <a:prstDash val="solid"/>
           </a:ln>
         </p:spPr>
+        <p:txBody>
+          <a:bodyPr/>
+          <a:lstStyle/>
+          <a:p>
+            <a:endParaRPr lang="ko-KR" altLang="en-US"/>
+          </a:p>
+        </p:txBody>
       </p:sp>
       <p:sp>
         <p:nvSpPr>
@@ -1602,6 +1623,13 @@
             </a:outerShdw>
           </a:effectLst>
         </p:spPr>
+        <p:txBody>
+          <a:bodyPr/>
+          <a:lstStyle/>
+          <a:p>
+            <a:endParaRPr lang="ko-KR" altLang="en-US"/>
+          </a:p>
+        </p:txBody>
       </p:sp>
       <p:sp>
         <p:nvSpPr>
@@ -1792,7 +1820,7 @@
                 <a:ea typeface="Arial Black" pitchFamily="34" charset="-122"/>
                 <a:cs typeface="Arial Black" pitchFamily="34" charset="-120"/>
               </a:rPr>
-              <a:t>EXPLAIN ANALYZE</a:t>
+              <a:t>EXPLAIN</a:t>
             </a:r>
             <a:endParaRPr lang="en-US" sz="4000" dirty="0"/>
           </a:p>
@@ -1823,7 +1851,7 @@
               <a:buNone/>
             </a:pPr>
             <a:r>
-              <a:rPr lang="en-US" sz="2000" b="1" dirty="0" smtClean="0">
+              <a:rPr lang="en-US" sz="2000" b="1" dirty="0">
                 <a:solidFill>
                   <a:srgbClr val="38BDF8"/>
                 </a:solidFill>
@@ -1831,18 +1859,7 @@
                 <a:ea typeface="Arial Black" pitchFamily="34" charset="-122"/>
                 <a:cs typeface="Arial Black" pitchFamily="34" charset="-120"/>
               </a:rPr>
-              <a:t>Keyword in </a:t>
-            </a:r>
-            <a:r>
-              <a:rPr lang="en-US" sz="2000" b="1" dirty="0">
-                <a:solidFill>
-                  <a:srgbClr val="38BDF8"/>
-                </a:solidFill>
-                <a:latin typeface="Arial Black" pitchFamily="34" charset="0"/>
-                <a:ea typeface="Arial Black" pitchFamily="34" charset="-122"/>
-                <a:cs typeface="Arial Black" pitchFamily="34" charset="-120"/>
-              </a:rPr>
-              <a:t>PostgreSQL</a:t>
+              <a:t>Keyword in PostgreSQL</a:t>
             </a:r>
             <a:endParaRPr lang="en-US" sz="2000" dirty="0"/>
           </a:p>
@@ -1881,10 +1898,15 @@
                 <a:ea typeface="Calibri" pitchFamily="34" charset="-122"/>
                 <a:cs typeface="Calibri" pitchFamily="34" charset="-120"/>
               </a:rPr>
-              <a:t>Why </a:t>
-            </a:r>
-            <a:r>
-              <a:rPr lang="en-US" sz="1500" dirty="0" smtClean="0">
+              <a:t>Why you should know about</a:t>
+            </a:r>
+          </a:p>
+          <a:p>
+            <a:pPr marL="0" indent="0" algn="l">
+              <a:buNone/>
+            </a:pPr>
+            <a:r>
+              <a:rPr lang="en-US" sz="1500" dirty="0">
                 <a:solidFill>
                   <a:srgbClr val="94A3B8"/>
                 </a:solidFill>
@@ -1892,34 +1914,7 @@
                 <a:ea typeface="Calibri" pitchFamily="34" charset="-122"/>
                 <a:cs typeface="Calibri" pitchFamily="34" charset="-120"/>
               </a:rPr>
-              <a:t>you should know about</a:t>
-            </a:r>
-          </a:p>
-          <a:p>
-            <a:pPr marL="0" indent="0" algn="l">
-              <a:buNone/>
-            </a:pPr>
-            <a:r>
-              <a:rPr lang="en-US" sz="1500" dirty="0" smtClean="0">
-                <a:solidFill>
-                  <a:srgbClr val="94A3B8"/>
-                </a:solidFill>
-                <a:latin typeface="Calibri" pitchFamily="34" charset="0"/>
-                <a:ea typeface="Calibri" pitchFamily="34" charset="-122"/>
-                <a:cs typeface="Calibri" pitchFamily="34" charset="-120"/>
-              </a:rPr>
-              <a:t>Query </a:t>
-            </a:r>
-            <a:r>
-              <a:rPr lang="en-US" sz="1500" dirty="0">
-                <a:solidFill>
-                  <a:srgbClr val="94A3B8"/>
-                </a:solidFill>
-                <a:latin typeface="Calibri" pitchFamily="34" charset="0"/>
-                <a:ea typeface="Calibri" pitchFamily="34" charset="-122"/>
-                <a:cs typeface="Calibri" pitchFamily="34" charset="-120"/>
-              </a:rPr>
-              <a:t>Execution Plans</a:t>
+              <a:t>Query Execution Plans</a:t>
             </a:r>
             <a:endParaRPr lang="en-US" sz="1500" dirty="0"/>
           </a:p>
@@ -1988,6 +1983,13 @@
             <a:prstDash val="solid"/>
           </a:ln>
         </p:spPr>
+        <p:txBody>
+          <a:bodyPr/>
+          <a:lstStyle/>
+          <a:p>
+            <a:endParaRPr lang="ko-KR" altLang="en-US"/>
+          </a:p>
+        </p:txBody>
       </p:sp>
     </p:spTree>
   </p:cSld>
@@ -2046,6 +2048,13 @@
             <a:prstDash val="solid"/>
           </a:ln>
         </p:spPr>
+        <p:txBody>
+          <a:bodyPr/>
+          <a:lstStyle/>
+          <a:p>
+            <a:endParaRPr lang="ko-KR" altLang="en-US"/>
+          </a:p>
+        </p:txBody>
       </p:sp>
       <p:sp>
         <p:nvSpPr>
@@ -2117,6 +2126,13 @@
             </a:outerShdw>
           </a:effectLst>
         </p:spPr>
+        <p:txBody>
+          <a:bodyPr/>
+          <a:lstStyle/>
+          <a:p>
+            <a:endParaRPr lang="ko-KR" altLang="en-US"/>
+          </a:p>
+        </p:txBody>
       </p:sp>
       <p:sp>
         <p:nvSpPr>
@@ -2142,6 +2158,13 @@
             <a:prstDash val="solid"/>
           </a:ln>
         </p:spPr>
+        <p:txBody>
+          <a:bodyPr/>
+          <a:lstStyle/>
+          <a:p>
+            <a:endParaRPr lang="ko-KR" altLang="en-US"/>
+          </a:p>
+        </p:txBody>
       </p:sp>
       <p:sp>
         <p:nvSpPr>
@@ -2410,6 +2433,13 @@
             </a:outerShdw>
           </a:effectLst>
         </p:spPr>
+        <p:txBody>
+          <a:bodyPr/>
+          <a:lstStyle/>
+          <a:p>
+            <a:endParaRPr lang="ko-KR" altLang="en-US"/>
+          </a:p>
+        </p:txBody>
       </p:sp>
       <p:sp>
         <p:nvSpPr>
@@ -2435,6 +2465,13 @@
             <a:prstDash val="solid"/>
           </a:ln>
         </p:spPr>
+        <p:txBody>
+          <a:bodyPr/>
+          <a:lstStyle/>
+          <a:p>
+            <a:endParaRPr lang="ko-KR" altLang="en-US"/>
+          </a:p>
+        </p:txBody>
       </p:sp>
       <p:sp>
         <p:nvSpPr>
@@ -2694,6 +2731,13 @@
             <a:prstDash val="solid"/>
           </a:ln>
         </p:spPr>
+        <p:txBody>
+          <a:bodyPr/>
+          <a:lstStyle/>
+          <a:p>
+            <a:endParaRPr lang="ko-KR" altLang="en-US"/>
+          </a:p>
+        </p:txBody>
       </p:sp>
       <p:sp>
         <p:nvSpPr>
@@ -2791,6 +2835,13 @@
             <a:prstDash val="solid"/>
           </a:ln>
         </p:spPr>
+        <p:txBody>
+          <a:bodyPr/>
+          <a:lstStyle/>
+          <a:p>
+            <a:endParaRPr lang="ko-KR" altLang="en-US"/>
+          </a:p>
+        </p:txBody>
       </p:sp>
       <p:sp>
         <p:nvSpPr>
@@ -2862,6 +2913,13 @@
             </a:outerShdw>
           </a:effectLst>
         </p:spPr>
+        <p:txBody>
+          <a:bodyPr/>
+          <a:lstStyle/>
+          <a:p>
+            <a:endParaRPr lang="ko-KR" altLang="en-US"/>
+          </a:p>
+        </p:txBody>
       </p:sp>
       <p:sp>
         <p:nvSpPr>
@@ -3160,6 +3218,13 @@
             </a:outerShdw>
           </a:effectLst>
         </p:spPr>
+        <p:txBody>
+          <a:bodyPr/>
+          <a:lstStyle/>
+          <a:p>
+            <a:endParaRPr lang="ko-KR" altLang="en-US"/>
+          </a:p>
+        </p:txBody>
       </p:sp>
       <p:sp>
         <p:nvSpPr>
@@ -3185,6 +3250,13 @@
             <a:prstDash val="solid"/>
           </a:ln>
         </p:spPr>
+        <p:txBody>
+          <a:bodyPr/>
+          <a:lstStyle/>
+          <a:p>
+            <a:endParaRPr lang="ko-KR" altLang="en-US"/>
+          </a:p>
+        </p:txBody>
       </p:sp>
       <p:sp>
         <p:nvSpPr>
@@ -3295,6 +3367,13 @@
             </a:outerShdw>
           </a:effectLst>
         </p:spPr>
+        <p:txBody>
+          <a:bodyPr/>
+          <a:lstStyle/>
+          <a:p>
+            <a:endParaRPr lang="ko-KR" altLang="en-US"/>
+          </a:p>
+        </p:txBody>
       </p:sp>
       <p:sp>
         <p:nvSpPr>
@@ -3320,6 +3399,13 @@
             <a:prstDash val="solid"/>
           </a:ln>
         </p:spPr>
+        <p:txBody>
+          <a:bodyPr/>
+          <a:lstStyle/>
+          <a:p>
+            <a:endParaRPr lang="ko-KR" altLang="en-US"/>
+          </a:p>
+        </p:txBody>
       </p:sp>
       <p:sp>
         <p:nvSpPr>
@@ -3430,6 +3516,13 @@
             </a:outerShdw>
           </a:effectLst>
         </p:spPr>
+        <p:txBody>
+          <a:bodyPr/>
+          <a:lstStyle/>
+          <a:p>
+            <a:endParaRPr lang="ko-KR" altLang="en-US"/>
+          </a:p>
+        </p:txBody>
       </p:sp>
       <p:sp>
         <p:nvSpPr>
@@ -3455,6 +3548,13 @@
             <a:prstDash val="solid"/>
           </a:ln>
         </p:spPr>
+        <p:txBody>
+          <a:bodyPr/>
+          <a:lstStyle/>
+          <a:p>
+            <a:endParaRPr lang="ko-KR" altLang="en-US"/>
+          </a:p>
+        </p:txBody>
       </p:sp>
       <p:sp>
         <p:nvSpPr>
@@ -3565,6 +3665,13 @@
             </a:outerShdw>
           </a:effectLst>
         </p:spPr>
+        <p:txBody>
+          <a:bodyPr/>
+          <a:lstStyle/>
+          <a:p>
+            <a:endParaRPr lang="ko-KR" altLang="en-US"/>
+          </a:p>
+        </p:txBody>
       </p:sp>
       <p:sp>
         <p:nvSpPr>
@@ -3590,6 +3697,13 @@
             <a:prstDash val="solid"/>
           </a:ln>
         </p:spPr>
+        <p:txBody>
+          <a:bodyPr/>
+          <a:lstStyle/>
+          <a:p>
+            <a:endParaRPr lang="ko-KR" altLang="en-US"/>
+          </a:p>
+        </p:txBody>
       </p:sp>
       <p:sp>
         <p:nvSpPr>
@@ -3700,6 +3814,13 @@
             </a:outerShdw>
           </a:effectLst>
         </p:spPr>
+        <p:txBody>
+          <a:bodyPr/>
+          <a:lstStyle/>
+          <a:p>
+            <a:endParaRPr lang="ko-KR" altLang="en-US"/>
+          </a:p>
+        </p:txBody>
       </p:sp>
       <p:sp>
         <p:nvSpPr>
@@ -3725,6 +3846,13 @@
             <a:prstDash val="solid"/>
           </a:ln>
         </p:spPr>
+        <p:txBody>
+          <a:bodyPr/>
+          <a:lstStyle/>
+          <a:p>
+            <a:endParaRPr lang="ko-KR" altLang="en-US"/>
+          </a:p>
+        </p:txBody>
       </p:sp>
       <p:sp>
         <p:nvSpPr>
@@ -3835,6 +3963,13 @@
             </a:outerShdw>
           </a:effectLst>
         </p:spPr>
+        <p:txBody>
+          <a:bodyPr/>
+          <a:lstStyle/>
+          <a:p>
+            <a:endParaRPr lang="ko-KR" altLang="en-US"/>
+          </a:p>
+        </p:txBody>
       </p:sp>
       <p:sp>
         <p:nvSpPr>
@@ -3860,6 +3995,13 @@
             <a:prstDash val="solid"/>
           </a:ln>
         </p:spPr>
+        <p:txBody>
+          <a:bodyPr/>
+          <a:lstStyle/>
+          <a:p>
+            <a:endParaRPr lang="ko-KR" altLang="en-US"/>
+          </a:p>
+        </p:txBody>
       </p:sp>
       <p:sp>
         <p:nvSpPr>
@@ -3996,6 +4138,13 @@
             <a:prstDash val="solid"/>
           </a:ln>
         </p:spPr>
+        <p:txBody>
+          <a:bodyPr/>
+          <a:lstStyle/>
+          <a:p>
+            <a:endParaRPr lang="ko-KR" altLang="en-US"/>
+          </a:p>
+        </p:txBody>
       </p:sp>
       <p:sp>
         <p:nvSpPr>
@@ -4122,6 +4271,13 @@
             <a:prstDash val="solid"/>
           </a:ln>
         </p:spPr>
+        <p:txBody>
+          <a:bodyPr/>
+          <a:lstStyle/>
+          <a:p>
+            <a:endParaRPr lang="ko-KR" altLang="en-US"/>
+          </a:p>
+        </p:txBody>
       </p:sp>
       <p:sp>
         <p:nvSpPr>
@@ -4193,6 +4349,13 @@
             </a:outerShdw>
           </a:effectLst>
         </p:spPr>
+        <p:txBody>
+          <a:bodyPr/>
+          <a:lstStyle/>
+          <a:p>
+            <a:endParaRPr lang="ko-KR" altLang="en-US"/>
+          </a:p>
+        </p:txBody>
       </p:sp>
       <p:sp>
         <p:nvSpPr>
@@ -4218,6 +4381,13 @@
             <a:prstDash val="solid"/>
           </a:ln>
         </p:spPr>
+        <p:txBody>
+          <a:bodyPr/>
+          <a:lstStyle/>
+          <a:p>
+            <a:endParaRPr lang="ko-KR" altLang="en-US"/>
+          </a:p>
+        </p:txBody>
       </p:sp>
       <p:sp>
         <p:nvSpPr>
@@ -4284,6 +4454,13 @@
             <a:prstDash val="solid"/>
           </a:ln>
         </p:spPr>
+        <p:txBody>
+          <a:bodyPr/>
+          <a:lstStyle/>
+          <a:p>
+            <a:endParaRPr lang="ko-KR" altLang="en-US"/>
+          </a:p>
+        </p:txBody>
       </p:sp>
       <p:sp>
         <p:nvSpPr>
@@ -4433,6 +4610,13 @@
             </a:outerShdw>
           </a:effectLst>
         </p:spPr>
+        <p:txBody>
+          <a:bodyPr/>
+          <a:lstStyle/>
+          <a:p>
+            <a:endParaRPr lang="ko-KR" altLang="en-US"/>
+          </a:p>
+        </p:txBody>
       </p:sp>
       <p:sp>
         <p:nvSpPr>
@@ -4458,6 +4642,13 @@
             <a:prstDash val="solid"/>
           </a:ln>
         </p:spPr>
+        <p:txBody>
+          <a:bodyPr/>
+          <a:lstStyle/>
+          <a:p>
+            <a:endParaRPr lang="ko-KR" altLang="en-US"/>
+          </a:p>
+        </p:txBody>
       </p:sp>
       <p:sp>
         <p:nvSpPr>
@@ -4524,6 +4715,13 @@
             <a:prstDash val="solid"/>
           </a:ln>
         </p:spPr>
+        <p:txBody>
+          <a:bodyPr/>
+          <a:lstStyle/>
+          <a:p>
+            <a:endParaRPr lang="ko-KR" altLang="en-US"/>
+          </a:p>
+        </p:txBody>
       </p:sp>
       <p:sp>
         <p:nvSpPr>
@@ -4673,6 +4871,13 @@
             </a:outerShdw>
           </a:effectLst>
         </p:spPr>
+        <p:txBody>
+          <a:bodyPr/>
+          <a:lstStyle/>
+          <a:p>
+            <a:endParaRPr lang="ko-KR" altLang="en-US"/>
+          </a:p>
+        </p:txBody>
       </p:sp>
       <p:sp>
         <p:nvSpPr>
@@ -4698,6 +4903,13 @@
             <a:prstDash val="solid"/>
           </a:ln>
         </p:spPr>
+        <p:txBody>
+          <a:bodyPr/>
+          <a:lstStyle/>
+          <a:p>
+            <a:endParaRPr lang="ko-KR" altLang="en-US"/>
+          </a:p>
+        </p:txBody>
       </p:sp>
       <p:sp>
         <p:nvSpPr>
@@ -4764,6 +4976,13 @@
             <a:prstDash val="solid"/>
           </a:ln>
         </p:spPr>
+        <p:txBody>
+          <a:bodyPr/>
+          <a:lstStyle/>
+          <a:p>
+            <a:endParaRPr lang="ko-KR" altLang="en-US"/>
+          </a:p>
+        </p:txBody>
       </p:sp>
       <p:sp>
         <p:nvSpPr>
@@ -4913,6 +5132,13 @@
             </a:outerShdw>
           </a:effectLst>
         </p:spPr>
+        <p:txBody>
+          <a:bodyPr/>
+          <a:lstStyle/>
+          <a:p>
+            <a:endParaRPr lang="ko-KR" altLang="en-US"/>
+          </a:p>
+        </p:txBody>
       </p:sp>
       <p:sp>
         <p:nvSpPr>
@@ -4938,6 +5164,13 @@
             <a:prstDash val="solid"/>
           </a:ln>
         </p:spPr>
+        <p:txBody>
+          <a:bodyPr/>
+          <a:lstStyle/>
+          <a:p>
+            <a:endParaRPr lang="ko-KR" altLang="en-US"/>
+          </a:p>
+        </p:txBody>
       </p:sp>
       <p:sp>
         <p:nvSpPr>
@@ -5004,6 +5237,13 @@
             <a:prstDash val="solid"/>
           </a:ln>
         </p:spPr>
+        <p:txBody>
+          <a:bodyPr/>
+          <a:lstStyle/>
+          <a:p>
+            <a:endParaRPr lang="ko-KR" altLang="en-US"/>
+          </a:p>
+        </p:txBody>
       </p:sp>
       <p:sp>
         <p:nvSpPr>
@@ -5153,6 +5393,13 @@
             </a:outerShdw>
           </a:effectLst>
         </p:spPr>
+        <p:txBody>
+          <a:bodyPr/>
+          <a:lstStyle/>
+          <a:p>
+            <a:endParaRPr lang="ko-KR" altLang="en-US"/>
+          </a:p>
+        </p:txBody>
       </p:sp>
       <p:sp>
         <p:nvSpPr>
@@ -5178,6 +5425,13 @@
             <a:prstDash val="solid"/>
           </a:ln>
         </p:spPr>
+        <p:txBody>
+          <a:bodyPr/>
+          <a:lstStyle/>
+          <a:p>
+            <a:endParaRPr lang="ko-KR" altLang="en-US"/>
+          </a:p>
+        </p:txBody>
       </p:sp>
       <p:sp>
         <p:nvSpPr>
@@ -5244,6 +5498,13 @@
             <a:prstDash val="solid"/>
           </a:ln>
         </p:spPr>
+        <p:txBody>
+          <a:bodyPr/>
+          <a:lstStyle/>
+          <a:p>
+            <a:endParaRPr lang="ko-KR" altLang="en-US"/>
+          </a:p>
+        </p:txBody>
       </p:sp>
       <p:sp>
         <p:nvSpPr>
@@ -5393,6 +5654,13 @@
             </a:outerShdw>
           </a:effectLst>
         </p:spPr>
+        <p:txBody>
+          <a:bodyPr/>
+          <a:lstStyle/>
+          <a:p>
+            <a:endParaRPr lang="ko-KR" altLang="en-US"/>
+          </a:p>
+        </p:txBody>
       </p:sp>
       <p:sp>
         <p:nvSpPr>
@@ -5418,6 +5686,13 @@
             <a:prstDash val="solid"/>
           </a:ln>
         </p:spPr>
+        <p:txBody>
+          <a:bodyPr/>
+          <a:lstStyle/>
+          <a:p>
+            <a:endParaRPr lang="ko-KR" altLang="en-US"/>
+          </a:p>
+        </p:txBody>
       </p:sp>
       <p:sp>
         <p:nvSpPr>
@@ -5484,6 +5759,13 @@
             <a:prstDash val="solid"/>
           </a:ln>
         </p:spPr>
+        <p:txBody>
+          <a:bodyPr/>
+          <a:lstStyle/>
+          <a:p>
+            <a:endParaRPr lang="ko-KR" altLang="en-US"/>
+          </a:p>
+        </p:txBody>
       </p:sp>
       <p:sp>
         <p:nvSpPr>
@@ -5659,6 +5941,13 @@
             <a:prstDash val="solid"/>
           </a:ln>
         </p:spPr>
+        <p:txBody>
+          <a:bodyPr/>
+          <a:lstStyle/>
+          <a:p>
+            <a:endParaRPr lang="ko-KR" altLang="en-US"/>
+          </a:p>
+        </p:txBody>
       </p:sp>
       <p:sp>
         <p:nvSpPr>
@@ -5785,6 +6074,13 @@
             <a:prstDash val="solid"/>
           </a:ln>
         </p:spPr>
+        <p:txBody>
+          <a:bodyPr/>
+          <a:lstStyle/>
+          <a:p>
+            <a:endParaRPr lang="ko-KR" altLang="en-US"/>
+          </a:p>
+        </p:txBody>
       </p:sp>
       <p:sp>
         <p:nvSpPr>
@@ -5911,6 +6207,13 @@
             <a:prstDash val="solid"/>
           </a:ln>
         </p:spPr>
+        <p:txBody>
+          <a:bodyPr/>
+          <a:lstStyle/>
+          <a:p>
+            <a:endParaRPr lang="ko-KR" altLang="en-US"/>
+          </a:p>
+        </p:txBody>
       </p:sp>
       <p:sp>
         <p:nvSpPr>
@@ -6037,6 +6340,13 @@
             <a:prstDash val="solid"/>
           </a:ln>
         </p:spPr>
+        <p:txBody>
+          <a:bodyPr/>
+          <a:lstStyle/>
+          <a:p>
+            <a:endParaRPr lang="ko-KR" altLang="en-US"/>
+          </a:p>
+        </p:txBody>
       </p:sp>
       <p:sp>
         <p:nvSpPr>
@@ -6108,6 +6418,13 @@
             </a:outerShdw>
           </a:effectLst>
         </p:spPr>
+        <p:txBody>
+          <a:bodyPr/>
+          <a:lstStyle/>
+          <a:p>
+            <a:endParaRPr lang="ko-KR" altLang="en-US"/>
+          </a:p>
+        </p:txBody>
       </p:sp>
       <p:sp>
         <p:nvSpPr>
@@ -6133,6 +6450,13 @@
             <a:prstDash val="solid"/>
           </a:ln>
         </p:spPr>
+        <p:txBody>
+          <a:bodyPr/>
+          <a:lstStyle/>
+          <a:p>
+            <a:endParaRPr lang="ko-KR" altLang="en-US"/>
+          </a:p>
+        </p:txBody>
       </p:sp>
       <p:sp>
         <p:nvSpPr>
@@ -6162,6 +6486,13 @@
             <a:prstDash val="solid"/>
           </a:ln>
         </p:spPr>
+        <p:txBody>
+          <a:bodyPr/>
+          <a:lstStyle/>
+          <a:p>
+            <a:endParaRPr lang="ko-KR" altLang="en-US"/>
+          </a:p>
+        </p:txBody>
       </p:sp>
       <p:sp>
         <p:nvSpPr>
@@ -6389,6 +6720,13 @@
             </a:outerShdw>
           </a:effectLst>
         </p:spPr>
+        <p:txBody>
+          <a:bodyPr/>
+          <a:lstStyle/>
+          <a:p>
+            <a:endParaRPr lang="ko-KR" altLang="en-US"/>
+          </a:p>
+        </p:txBody>
       </p:sp>
       <p:sp>
         <p:nvSpPr>
@@ -6414,6 +6752,13 @@
             <a:prstDash val="solid"/>
           </a:ln>
         </p:spPr>
+        <p:txBody>
+          <a:bodyPr/>
+          <a:lstStyle/>
+          <a:p>
+            <a:endParaRPr lang="ko-KR" altLang="en-US"/>
+          </a:p>
+        </p:txBody>
       </p:sp>
       <p:sp>
         <p:nvSpPr>
@@ -6443,6 +6788,13 @@
             <a:prstDash val="solid"/>
           </a:ln>
         </p:spPr>
+        <p:txBody>
+          <a:bodyPr/>
+          <a:lstStyle/>
+          <a:p>
+            <a:endParaRPr lang="ko-KR" altLang="en-US"/>
+          </a:p>
+        </p:txBody>
       </p:sp>
       <p:sp>
         <p:nvSpPr>
@@ -6670,6 +7022,13 @@
             </a:outerShdw>
           </a:effectLst>
         </p:spPr>
+        <p:txBody>
+          <a:bodyPr/>
+          <a:lstStyle/>
+          <a:p>
+            <a:endParaRPr lang="ko-KR" altLang="en-US"/>
+          </a:p>
+        </p:txBody>
       </p:sp>
       <p:sp>
         <p:nvSpPr>
@@ -6695,6 +7054,13 @@
             <a:prstDash val="solid"/>
           </a:ln>
         </p:spPr>
+        <p:txBody>
+          <a:bodyPr/>
+          <a:lstStyle/>
+          <a:p>
+            <a:endParaRPr lang="ko-KR" altLang="en-US"/>
+          </a:p>
+        </p:txBody>
       </p:sp>
       <p:sp>
         <p:nvSpPr>
@@ -6724,6 +7090,13 @@
             <a:prstDash val="solid"/>
           </a:ln>
         </p:spPr>
+        <p:txBody>
+          <a:bodyPr/>
+          <a:lstStyle/>
+          <a:p>
+            <a:endParaRPr lang="ko-KR" altLang="en-US"/>
+          </a:p>
+        </p:txBody>
       </p:sp>
       <p:sp>
         <p:nvSpPr>
@@ -6951,6 +7324,13 @@
             </a:outerShdw>
           </a:effectLst>
         </p:spPr>
+        <p:txBody>
+          <a:bodyPr/>
+          <a:lstStyle/>
+          <a:p>
+            <a:endParaRPr lang="ko-KR" altLang="en-US"/>
+          </a:p>
+        </p:txBody>
       </p:sp>
       <p:sp>
         <p:nvSpPr>
@@ -6976,6 +7356,13 @@
             <a:prstDash val="solid"/>
           </a:ln>
         </p:spPr>
+        <p:txBody>
+          <a:bodyPr/>
+          <a:lstStyle/>
+          <a:p>
+            <a:endParaRPr lang="ko-KR" altLang="en-US"/>
+          </a:p>
+        </p:txBody>
       </p:sp>
       <p:sp>
         <p:nvSpPr>
@@ -7005,6 +7392,13 @@
             <a:prstDash val="solid"/>
           </a:ln>
         </p:spPr>
+        <p:txBody>
+          <a:bodyPr/>
+          <a:lstStyle/>
+          <a:p>
+            <a:endParaRPr lang="ko-KR" altLang="en-US"/>
+          </a:p>
+        </p:txBody>
       </p:sp>
       <p:sp>
         <p:nvSpPr>
@@ -7232,6 +7626,13 @@
             </a:outerShdw>
           </a:effectLst>
         </p:spPr>
+        <p:txBody>
+          <a:bodyPr/>
+          <a:lstStyle/>
+          <a:p>
+            <a:endParaRPr lang="ko-KR" altLang="en-US"/>
+          </a:p>
+        </p:txBody>
       </p:sp>
       <p:sp>
         <p:nvSpPr>
@@ -7257,6 +7658,13 @@
             <a:prstDash val="solid"/>
           </a:ln>
         </p:spPr>
+        <p:txBody>
+          <a:bodyPr/>
+          <a:lstStyle/>
+          <a:p>
+            <a:endParaRPr lang="ko-KR" altLang="en-US"/>
+          </a:p>
+        </p:txBody>
       </p:sp>
       <p:sp>
         <p:nvSpPr>
@@ -7286,6 +7694,13 @@
             <a:prstDash val="solid"/>
           </a:ln>
         </p:spPr>
+        <p:txBody>
+          <a:bodyPr/>
+          <a:lstStyle/>
+          <a:p>
+            <a:endParaRPr lang="ko-KR" altLang="en-US"/>
+          </a:p>
+        </p:txBody>
       </p:sp>
       <p:sp>
         <p:nvSpPr>
